--- a/catalog/samples/decision_page.pptx
+++ b/catalog/samples/decision_page.pptx
@@ -1072,7 +1072,7 @@
           </a:p>
           <a:p>
             <a:r>
-              <a:t>  "template_sha256": "f41d56a024b54cad4b3dfb014e9c3b29a6f3a66585af1f1b3ed73e01febfc8ab"</a:t>
+              <a:t>  "template_sha256": "fa4948b5bf5a43af39fb24b0a7f0e5d29c886d3346e9c4cfb7c845453ab43888"</a:t>
             </a:r>
           </a:p>
           <a:p>
